--- a/2026-10-09 Working with Data in Excel/Working with Data in Excel.pptx
+++ b/2026-10-09 Working with Data in Excel/Working with Data in Excel.pptx
@@ -142,20 +142,12 @@
 </p:presentation>
 </file>
 
-<file path=ppt/revisionInfo.xml><?xml version="1.0" encoding="utf-8"?>
-<p1510:revInfo xmlns:a="http://schemas.openxmlformats.org/drawingml/2006/main" xmlns:r="http://schemas.openxmlformats.org/officeDocument/2006/relationships" xmlns:p1510="http://schemas.microsoft.com/office/powerpoint/2015/10/main">
-  <p1510:revLst>
-    <p1510:client id="{091220E8-56CB-488E-9B2D-BABFA6ECEF1F}" v="4" dt="2026-10-06T18:43:29.554"/>
-  </p1510:revLst>
-</p1510:revInfo>
-</file>
-
 <file path=ppt/changesInfos/changesInfo1.xml><?xml version="1.0" encoding="utf-8"?>
 <pc:chgInfo xmlns:a="http://schemas.openxmlformats.org/drawingml/2006/main" xmlns:r="http://schemas.openxmlformats.org/officeDocument/2006/relationships" xmlns:ac="http://schemas.microsoft.com/office/drawing/2013/main/command" xmlns:pc="http://schemas.microsoft.com/office/powerpoint/2013/main/command">
   <pc:docChgLst>
     <pc:chgData name="Keiko Bridwell" userId="0d8c6daf-78c4-42ff-97a7-dd086c6e026c" providerId="ADAL" clId="{5415DAD3-9AF0-46DC-A4E6-8437E905FDE1}"/>
     <pc:docChg chg="undo custSel addSld delSld modSld">
-      <pc:chgData name="Keiko Bridwell" userId="0d8c6daf-78c4-42ff-97a7-dd086c6e026c" providerId="ADAL" clId="{5415DAD3-9AF0-46DC-A4E6-8437E905FDE1}" dt="2026-10-06T18:46:17.219" v="3295" actId="20577"/>
+      <pc:chgData name="Keiko Bridwell" userId="0d8c6daf-78c4-42ff-97a7-dd086c6e026c" providerId="ADAL" clId="{5415DAD3-9AF0-46DC-A4E6-8437E905FDE1}" dt="2026-10-08T18:58:09.755" v="3298" actId="948"/>
       <pc:docMkLst>
         <pc:docMk/>
       </pc:docMkLst>
@@ -278,7 +270,7 @@
         </pc:spChg>
       </pc:sldChg>
       <pc:sldChg chg="modSp add mod modNotesTx">
-        <pc:chgData name="Keiko Bridwell" userId="0d8c6daf-78c4-42ff-97a7-dd086c6e026c" providerId="ADAL" clId="{5415DAD3-9AF0-46DC-A4E6-8437E905FDE1}" dt="2026-10-06T18:44:16.165" v="3209" actId="2711"/>
+        <pc:chgData name="Keiko Bridwell" userId="0d8c6daf-78c4-42ff-97a7-dd086c6e026c" providerId="ADAL" clId="{5415DAD3-9AF0-46DC-A4E6-8437E905FDE1}" dt="2026-10-08T18:58:09.755" v="3298" actId="948"/>
         <pc:sldMkLst>
           <pc:docMk/>
           <pc:sldMk cId="3407393377" sldId="299"/>
@@ -292,7 +284,7 @@
           </ac:spMkLst>
         </pc:spChg>
         <pc:spChg chg="mod">
-          <ac:chgData name="Keiko Bridwell" userId="0d8c6daf-78c4-42ff-97a7-dd086c6e026c" providerId="ADAL" clId="{5415DAD3-9AF0-46DC-A4E6-8437E905FDE1}" dt="2026-10-06T18:44:16.165" v="3209" actId="2711"/>
+          <ac:chgData name="Keiko Bridwell" userId="0d8c6daf-78c4-42ff-97a7-dd086c6e026c" providerId="ADAL" clId="{5415DAD3-9AF0-46DC-A4E6-8437E905FDE1}" dt="2026-10-08T18:58:09.755" v="3298" actId="948"/>
           <ac:spMkLst>
             <pc:docMk/>
             <pc:sldMk cId="3407393377" sldId="299"/>
@@ -329,29 +321,6 @@
           <pc:docMk/>
           <pc:sldMk cId="635538424" sldId="301"/>
         </pc:sldMkLst>
-      </pc:sldChg>
-      <pc:sldChg chg="modSp add del mod">
-        <pc:chgData name="Keiko Bridwell" userId="0d8c6daf-78c4-42ff-97a7-dd086c6e026c" providerId="ADAL" clId="{5415DAD3-9AF0-46DC-A4E6-8437E905FDE1}" dt="2026-10-06T18:42:04.721" v="3191" actId="47"/>
-        <pc:sldMkLst>
-          <pc:docMk/>
-          <pc:sldMk cId="1342770331" sldId="301"/>
-        </pc:sldMkLst>
-        <pc:spChg chg="mod">
-          <ac:chgData name="Keiko Bridwell" userId="0d8c6daf-78c4-42ff-97a7-dd086c6e026c" providerId="ADAL" clId="{5415DAD3-9AF0-46DC-A4E6-8437E905FDE1}" dt="2026-09-28T19:41:06.228" v="721" actId="20577"/>
-          <ac:spMkLst>
-            <pc:docMk/>
-            <pc:sldMk cId="1342770331" sldId="301"/>
-            <ac:spMk id="2" creationId="{37BD9D9B-5BAF-4D2E-2F23-BFD8C809AC2A}"/>
-          </ac:spMkLst>
-        </pc:spChg>
-        <pc:spChg chg="mod">
-          <ac:chgData name="Keiko Bridwell" userId="0d8c6daf-78c4-42ff-97a7-dd086c6e026c" providerId="ADAL" clId="{5415DAD3-9AF0-46DC-A4E6-8437E905FDE1}" dt="2026-10-06T18:41:31.197" v="3183" actId="20577"/>
-          <ac:spMkLst>
-            <pc:docMk/>
-            <pc:sldMk cId="1342770331" sldId="301"/>
-            <ac:spMk id="3" creationId="{AE535EB2-BF92-CE4B-C820-0D4172EEF4CF}"/>
-          </ac:spMkLst>
-        </pc:spChg>
       </pc:sldChg>
       <pc:sldChg chg="add">
         <pc:chgData name="Keiko Bridwell" userId="0d8c6daf-78c4-42ff-97a7-dd086c6e026c" providerId="ADAL" clId="{5415DAD3-9AF0-46DC-A4E6-8437E905FDE1}" dt="2026-10-06T18:43:29.546" v="3206"/>
@@ -563,7 +532,7 @@
           <a:p>
             <a:fld id="{D0C9B534-04A1-45CA-9C5C-ABF1179B4F88}" type="datetimeFigureOut">
               <a:rPr lang="en-US" smtClean="0"/>
-              <a:t>10/6/2026</a:t>
+              <a:t>10/8/2026</a:t>
             </a:fld>
             <a:endParaRPr lang="en-US"/>
           </a:p>
@@ -740,7 +709,7 @@
           <a:p>
             <a:fld id="{8196130A-F014-4FEA-8E56-DF20D01199DE}" type="datetimeFigureOut">
               <a:rPr lang="en-US" smtClean="0"/>
-              <a:t>10/6/2026</a:t>
+              <a:t>10/8/2026</a:t>
             </a:fld>
             <a:endParaRPr lang="en-US"/>
           </a:p>
@@ -9057,8 +9026,13 @@
             </a:endParaRPr>
           </a:p>
           <a:p>
-            <a:r>
-              <a:rPr lang="en-US" sz="1800" dirty="0">
+            <a:pPr lvl="1">
+              <a:spcBef>
+                <a:spcPts val="600"/>
+              </a:spcBef>
+            </a:pPr>
+            <a:r>
+              <a:rPr lang="en-US" sz="1600" dirty="0">
                 <a:ea typeface="Merriweather Light 18pt" pitchFamily="2" charset="0"/>
                 <a:cs typeface="Merriweather Light 18pt" pitchFamily="2" charset="0"/>
               </a:rPr>
